--- a/decks/englit-gothic/englit-gothic_ch4_tension-and-themes.pptx
+++ b/decks/englit-gothic/englit-gothic_ch4_tension-and-themes.pptx
@@ -129,29 +129,29 @@
   <p:extLst>
     <p:ext uri="{521415D9-36F7-43E2-AB2F-B90AF26B5E84}">
       <p14:sectionLst xmlns:p14="http://schemas.microsoft.com/office/powerpoint/2010/main">
-        <p14:section name="Opening" id="{b9142786-8bb0-726f-b25b-67e77f9d0369}">
+        <p14:section name="Opening" id="{46ab9a6e-06a9-8179-cb5d-a9a10b88eb35}">
           <p14:sldIdLst>
             <p14:sldId id="256"/>
           </p14:sldIdLst>
         </p14:section>
-        <p14:section name="Gate" id="{7ce09b50-34f2-5b35-1dcf-46492bc7770b}">
+        <p14:section name="Gate" id="{f4fedc4d-43f1-4d6f-b721-92da0954334f}">
           <p14:sldIdLst>
             <p14:sldId id="257"/>
             <p14:sldId id="258"/>
           </p14:sldIdLst>
         </p14:section>
-        <p14:section name="Pre-teach" id="{9ca84401-8317-861b-b835-6de5623c22cf}">
+        <p14:section name="Pre-teach" id="{07d97c8c-9d6a-2993-92f2-8114938f69cf}">
           <p14:sldIdLst>
             <p14:sldId id="259"/>
           </p14:sldIdLst>
         </p14:section>
-        <p14:section name="Read-along" id="{531bb6f9-6b3d-63c7-c366-970df80d188e}">
+        <p14:section name="Read-along" id="{a17e283c-b683-f4a5-3c2a-52d818ff39c0}">
           <p14:sldIdLst>
             <p14:sldId id="260"/>
             <p14:sldId id="261"/>
           </p14:sldIdLst>
         </p14:section>
-        <p14:section name="Teach" id="{712ca464-34ba-531c-3472-df7f7df764fd}">
+        <p14:section name="Teach" id="{3ecea322-36ac-66d2-b604-2fe8de4f1c4f}">
           <p14:sldIdLst>
             <p14:sldId id="262"/>
             <p14:sldId id="263"/>
@@ -161,7 +161,7 @@
             <p14:sldId id="267"/>
           </p14:sldIdLst>
         </p14:section>
-        <p14:section name="Routes" id="{4e814b7d-96d4-3ca6-bebc-add4e1f500be}">
+        <p14:section name="Routes" id="{30d81b3f-07d1-436e-eb1f-8f3cc08963e7}">
           <p14:sldIdLst>
             <p14:sldId id="268"/>
             <p14:sldId id="269"/>
@@ -171,12 +171,12 @@
             <p14:sldId id="273"/>
           </p14:sldIdLst>
         </p14:section>
-        <p14:section name="Close" id="{0903bb9a-02c9-3417-e643-c3bb22bbbb03}">
+        <p14:section name="Close" id="{8d24a551-acee-4419-86da-4603d9708fd1}">
           <p14:sldIdLst>
             <p14:sldId id="274"/>
           </p14:sldIdLst>
         </p14:section>
-        <p14:section name="Answers" id="{326923be-5d5e-3288-dc2a-bd0a9d06212f}">
+        <p14:section name="Answers" id="{6f1fa42f-9ea7-4fbb-3849-d85c7408ba43}">
           <p14:sldIdLst>
             <p14:sldId id="275"/>
             <p14:sldId id="276"/>
@@ -1523,7 +1523,7 @@
               <a:rPr lang="en-US" dirty="0"/>
               <a:t>Exit ticket — individual, silent, on a slip or mini-whiteboard. Recall before help: no notes, no lanes, no hints. Collect before pupils leave.
 Question: Read this sentence: ‘The door was bolted from the outside, and for the ninth time that day she counted the bricks in the wall.’ Which Gothic theme does it suggest most strongly?
-Answer: A   Entrapment. A door bolted from the outside is the clearest signal of entrapment. The counted bricks add a hint of madness, but nothing in the sentence is supernatural, deceptive or about innocence.
+Answer: D   Entrapment. A door bolted from the outside is the clearest signal of entrapment. The counted bricks add a hint of madness, but nothing in the sentence is supernatural, deceptive or about innocence.
 Source of this question: module 3 task ("Name the theme") from the manifest.
 Sort the slips: correct → ready to move on; incorrect → start next lesson in the pre-teach group, with the read-along and the Support lane. Same destination next time.</a:t>
             </a:r>
@@ -1614,9 +1614,9 @@
             <a:r>
               <a:rPr lang="en-US" dirty="0"/>
               <a:t>Do now — retrieval. Silent, no notes, no help: recall comes before any support. Give about four minutes.
-1. Which definition matches SUSPENSE as your lesson defined it?  →  B   Anticipation or worry about what is going to happen next
+1. Which definition matches SUSPENSE as your lesson defined it?  →  A   Anticipation or worry about what is going to happen next
 2. Being locked in with no way out is the Gothic theme of ___.  →  entrapment
-3. In the red-room passage, what does the repeated colour red suggest?  →  B   Blood, horror and death
+3. In the red-room passage, what does the repeated colour red suggest?  →  A   Blood, horror and death
 Circulate: who gets 3/3 (Stretch route), 2/3 (Core), 0–1 (Support)? Use this to route pupils later in the lesson.</a:t>
             </a:r>
             <a:endParaRPr lang="en-US" dirty="0"/>
@@ -1983,7 +1983,7 @@
             <a:r>
               <a:rPr lang="en-US" dirty="0"/>
               <a:t>Answers — exit ticket: Exit ticket. Reveal the answer; pupils mark their own work in a different colour, then read the "why" together. Same destination for every lane, so one answer serves the whole class.
-Answer: A   Entrapment
+Answer: D   Entrapment
 Why: A door bolted from the outside is the clearest signal of entrapment. The counted bricks add a hint of madness, but nothing in the sentence is supernatural, deceptive or about innocence.
 Ask a Support pupil to explain one step, and a Stretch pupil to share their extension.</a:t>
             </a:r>
@@ -2074,9 +2074,9 @@
             <a:r>
               <a:rPr lang="en-US" dirty="0"/>
               <a:t>Answers — pupils mark their own in a different colour, then hands up for 3/3, 2/3, 1/3.
-1. B   Anticipation or worry about what is going to happen next. Suspense is about waiting: the reader anticipates what comes next. Tension is the stress of an uncertain outcome.
+1. A   Anticipation or worry about what is going to happen next. Suspense is about waiting: the reader anticipates what comes next. Tension is the stress of an uncertain outcome.
 2. entrapment. Entrapment is being trapped. Jane in the red-room and Harker in the castle are both examples.
-3. B   Blood, horror and death. Your lesson called this a lexical chain: red, crimson, damask. In a Gothic text it points to blood and death, and the room is where Mr Reed died.
+3. A   Blood, horror and death. Your lesson called this a lexical chain: red, crimson, damask. In a Gothic text it points to blood and death, and the room is where Mr Reed died.
 Say the route each score points to: 3/3 Stretch, 2/3 Core, 0–1 Support. Pupils may choose to move up.</a:t>
             </a:r>
             <a:endParaRPr lang="en-US" dirty="0"/>
@@ -10779,7 +10779,7 @@
                 <a:ea typeface="Calibri" pitchFamily="34" charset="-122"/>
                 <a:cs typeface="Calibri" pitchFamily="34" charset="-120"/>
               </a:rPr>
-              <a:t>Entrapment</a:t>
+              <a:t>Appearance and reality</a:t>
             </a:r>
             <a:endParaRPr lang="en-US" sz="2200" dirty="0"/>
           </a:p>
@@ -10816,7 +10816,7 @@
                 <a:ea typeface="Calibri" pitchFamily="34" charset="-122"/>
                 <a:cs typeface="Calibri" pitchFamily="34" charset="-120"/>
               </a:rPr>
-              <a:t>The supernatural</a:t>
+              <a:t>Corruption of innocence</a:t>
             </a:r>
             <a:endParaRPr lang="en-US" sz="2200" dirty="0"/>
           </a:p>
@@ -10853,7 +10853,7 @@
                 <a:ea typeface="Calibri" pitchFamily="34" charset="-122"/>
                 <a:cs typeface="Calibri" pitchFamily="34" charset="-120"/>
               </a:rPr>
-              <a:t>Corruption of innocence</a:t>
+              <a:t>The supernatural</a:t>
             </a:r>
             <a:endParaRPr lang="en-US" sz="2200" dirty="0"/>
           </a:p>
@@ -10890,7 +10890,7 @@
                 <a:ea typeface="Calibri" pitchFamily="34" charset="-122"/>
                 <a:cs typeface="Calibri" pitchFamily="34" charset="-120"/>
               </a:rPr>
-              <a:t>Appearance and reality</a:t>
+              <a:t>Entrapment</a:t>
             </a:r>
             <a:endParaRPr lang="en-US" sz="2200" dirty="0"/>
           </a:p>
@@ -11370,7 +11370,7 @@
                 <a:ea typeface="Calibri" pitchFamily="34" charset="-122"/>
                 <a:cs typeface="Calibri" pitchFamily="34" charset="-120"/>
               </a:rPr>
-              <a:t>Stress or nervousness because the outcome is uncertain</a:t>
+              <a:t>Anticipation or worry about what is going to happen next</a:t>
             </a:r>
             <a:endParaRPr lang="en-US" sz="1800" dirty="0"/>
           </a:p>
@@ -11407,7 +11407,7 @@
                 <a:ea typeface="Calibri" pitchFamily="34" charset="-122"/>
                 <a:cs typeface="Calibri" pitchFamily="34" charset="-120"/>
               </a:rPr>
-              <a:t>Anticipation or worry about what is going to happen next</a:t>
+              <a:t>Stress or nervousness because the outcome is uncertain</a:t>
             </a:r>
             <a:endParaRPr lang="en-US" sz="1800" dirty="0"/>
           </a:p>
@@ -11883,7 +11883,7 @@
                 <a:ea typeface="Calibri" pitchFamily="34" charset="-122"/>
                 <a:cs typeface="Calibri" pitchFamily="34" charset="-120"/>
               </a:rPr>
-              <a:t>Warmth and comfort</a:t>
+              <a:t>Blood, horror and death</a:t>
             </a:r>
             <a:endParaRPr lang="en-US" sz="2400" dirty="0"/>
           </a:p>
@@ -11920,7 +11920,7 @@
                 <a:ea typeface="Calibri" pitchFamily="34" charset="-122"/>
                 <a:cs typeface="Calibri" pitchFamily="34" charset="-120"/>
               </a:rPr>
-              <a:t>Blood, horror and death</a:t>
+              <a:t>Warmth and comfort</a:t>
             </a:r>
             <a:endParaRPr lang="en-US" sz="2400" dirty="0"/>
           </a:p>
@@ -11957,7 +11957,7 @@
                 <a:ea typeface="Calibri" pitchFamily="34" charset="-122"/>
                 <a:cs typeface="Calibri" pitchFamily="34" charset="-120"/>
               </a:rPr>
-              <a:t>Wealth and celebration</a:t>
+              <a:t>Autumn leaves</a:t>
             </a:r>
             <a:endParaRPr lang="en-US" sz="2400" dirty="0"/>
           </a:p>
@@ -11994,7 +11994,7 @@
                 <a:ea typeface="Calibri" pitchFamily="34" charset="-122"/>
                 <a:cs typeface="Calibri" pitchFamily="34" charset="-120"/>
               </a:rPr>
-              <a:t>Autumn leaves</a:t>
+              <a:t>Wealth and celebration</a:t>
             </a:r>
             <a:endParaRPr lang="en-US" sz="2400" dirty="0"/>
           </a:p>
@@ -13938,7 +13938,7 @@
                 <a:ea typeface="Cambria" pitchFamily="34" charset="-122"/>
                 <a:cs typeface="Cambria" pitchFamily="34" charset="-120"/>
               </a:rPr>
-              <a:t>A   Entrapment</a:t>
+              <a:t>D   Entrapment</a:t>
             </a:r>
             <a:endParaRPr lang="en-US" sz="1800" dirty="0"/>
           </a:p>
@@ -14459,7 +14459,7 @@
                 <a:ea typeface="Calibri" pitchFamily="34" charset="-122"/>
                 <a:cs typeface="Calibri" pitchFamily="34" charset="-120"/>
               </a:rPr>
-              <a:t>B   Anticipation or worry about what is going to happen next</a:t>
+              <a:t>A   Anticipation or worry about what is going to happen next</a:t>
             </a:r>
             <a:endParaRPr lang="en-US" sz="2200" dirty="0"/>
           </a:p>
@@ -14939,7 +14939,7 @@
                 <a:ea typeface="Calibri" pitchFamily="34" charset="-122"/>
                 <a:cs typeface="Calibri" pitchFamily="34" charset="-120"/>
               </a:rPr>
-              <a:t>B   Blood, horror and death</a:t>
+              <a:t>A   Blood, horror and death</a:t>
             </a:r>
             <a:endParaRPr lang="en-US" sz="2200" dirty="0"/>
           </a:p>

--- a/decks/englit-gothic/englit-gothic_ch4_tension-and-themes.pptx
+++ b/decks/englit-gothic/englit-gothic_ch4_tension-and-themes.pptx
@@ -129,29 +129,29 @@
   <p:extLst>
     <p:ext uri="{521415D9-36F7-43E2-AB2F-B90AF26B5E84}">
       <p14:sectionLst xmlns:p14="http://schemas.microsoft.com/office/powerpoint/2010/main">
-        <p14:section name="Opening" id="{46ab9a6e-06a9-8179-cb5d-a9a10b88eb35}">
+        <p14:section name="Opening" id="{d9215efb-8c02-dd68-6864-eda90f2ef22d}">
           <p14:sldIdLst>
             <p14:sldId id="256"/>
           </p14:sldIdLst>
         </p14:section>
-        <p14:section name="Gate" id="{f4fedc4d-43f1-4d6f-b721-92da0954334f}">
+        <p14:section name="Gate" id="{addc5bdf-9ba7-a2f2-f07f-293a4d50a5b0}">
           <p14:sldIdLst>
             <p14:sldId id="257"/>
             <p14:sldId id="258"/>
           </p14:sldIdLst>
         </p14:section>
-        <p14:section name="Pre-teach" id="{07d97c8c-9d6a-2993-92f2-8114938f69cf}">
+        <p14:section name="Pre-teach" id="{6f15a2c3-e69f-9bcb-82f9-bc2b4a55968c}">
           <p14:sldIdLst>
             <p14:sldId id="259"/>
           </p14:sldIdLst>
         </p14:section>
-        <p14:section name="Read-along" id="{a17e283c-b683-f4a5-3c2a-52d818ff39c0}">
+        <p14:section name="Read-along" id="{5dc94b5b-73bc-237e-37f2-e8b343dabc3e}">
           <p14:sldIdLst>
             <p14:sldId id="260"/>
             <p14:sldId id="261"/>
           </p14:sldIdLst>
         </p14:section>
-        <p14:section name="Teach" id="{3ecea322-36ac-66d2-b604-2fe8de4f1c4f}">
+        <p14:section name="Teach" id="{514613e2-a85d-72f2-0310-1f8ddab8648a}">
           <p14:sldIdLst>
             <p14:sldId id="262"/>
             <p14:sldId id="263"/>
@@ -161,7 +161,7 @@
             <p14:sldId id="267"/>
           </p14:sldIdLst>
         </p14:section>
-        <p14:section name="Routes" id="{30d81b3f-07d1-436e-eb1f-8f3cc08963e7}">
+        <p14:section name="Routes" id="{d1b3c41d-23c8-5192-f115-71013293399b}">
           <p14:sldIdLst>
             <p14:sldId id="268"/>
             <p14:sldId id="269"/>
@@ -171,12 +171,12 @@
             <p14:sldId id="273"/>
           </p14:sldIdLst>
         </p14:section>
-        <p14:section name="Close" id="{8d24a551-acee-4419-86da-4603d9708fd1}">
+        <p14:section name="Close" id="{471bfd23-050d-a9f6-a056-b8ed8e5f9c7e}">
           <p14:sldIdLst>
             <p14:sldId id="274"/>
           </p14:sldIdLst>
         </p14:section>
-        <p14:section name="Answers" id="{6f1fa42f-9ea7-4fbb-3849-d85c7408ba43}">
+        <p14:section name="Answers" id="{5cca24f6-2c53-3e0c-68de-b13ce0b8e9ee}">
           <p14:sldIdLst>
             <p14:sldId id="275"/>
             <p14:sldId id="276"/>
